--- a/submission/Gauntlet-Deck.pptx
+++ b/submission/Gauntlet-Deck.pptx
@@ -4791,7 +4791,7 @@
                 </a:solidFill>
                 <a:latin typeface="Arial"/>
               </a:rPr>
-              <a:t>•  Oracle: 0% false positives, 20% false negatives on a labeled set (the miss is documented).</a:t>
+              <a:t>•  Oracle: 0% false positives, 11% false negatives on an 18-case labeled set (the miss is documented).</a:t>
             </a:r>
           </a:p>
           <a:p>
